--- a/slides/thursday_simple.pptx
+++ b/slides/thursday_simple.pptx
@@ -1005,7 +1005,7 @@
           <a:lstStyle/>
           <a:p>
             <a:r>
-              <a:t>Top 5 by average views: revert, reflog, stash, clean, reset. You felt this on Tuesday with the mustache.</a:t>
+              <a:t>Top 5 by average views: revert, reflog, stash, clean, reset. You felt this on Tuesday with the Intern's 🥸 card.</a:t>
             </a:r>
           </a:p>
         </p:txBody>
